--- a/finalvideo/Dollar_Doodle-Final.pptx
+++ b/finalvideo/Dollar_Doodle-Final.pptx
@@ -5,7 +5,7 @@
     <p:sldMasterId id="2147483672" r:id="rId1"/>
   </p:sldMasterIdLst>
   <p:notesMasterIdLst>
-    <p:notesMasterId r:id="rId10"/>
+    <p:notesMasterId r:id="rId9"/>
   </p:notesMasterIdLst>
   <p:sldIdLst>
     <p:sldId id="256" r:id="rId2"/>
@@ -13,9 +13,8 @@
     <p:sldId id="276" r:id="rId4"/>
     <p:sldId id="279" r:id="rId5"/>
     <p:sldId id="266" r:id="rId6"/>
-    <p:sldId id="281" r:id="rId7"/>
-    <p:sldId id="265" r:id="rId8"/>
-    <p:sldId id="283" r:id="rId9"/>
+    <p:sldId id="265" r:id="rId7"/>
+    <p:sldId id="283" r:id="rId8"/>
   </p:sldIdLst>
   <p:sldSz cx="12192000" cy="6858000"/>
   <p:notesSz cx="6858000" cy="9144000"/>
@@ -2051,7 +2050,7 @@
           <a:p>
             <a:fld id="{0D87179F-9BD5-5B4A-9732-82B6F0A838F2}" type="datetimeFigureOut">
               <a:rPr lang="en-US" smtClean="0"/>
-              <a:t>5/6/2026</a:t>
+              <a:t>5/8/2026</a:t>
             </a:fld>
             <a:endParaRPr lang="en-US"/>
           </a:p>
@@ -2729,97 +2728,6 @@
                 <a:ea typeface="Calibri"/>
                 <a:cs typeface="Calibri"/>
               </a:rPr>
-              <a:t>Alex</a:t>
-            </a:r>
-          </a:p>
-        </p:txBody>
-      </p:sp>
-      <p:sp>
-        <p:nvSpPr>
-          <p:cNvPr id="4" name="Slide Number Placeholder 3"/>
-          <p:cNvSpPr>
-            <a:spLocks noGrp="1"/>
-          </p:cNvSpPr>
-          <p:nvPr>
-            <p:ph type="sldNum" sz="quarter" idx="5"/>
-          </p:nvPr>
-        </p:nvSpPr>
-        <p:spPr/>
-        <p:txBody>
-          <a:bodyPr/>
-          <a:lstStyle/>
-          <a:p>
-            <a:fld id="{D994A83A-D7B7-F74C-80E6-B7ADD29D3C27}" type="slidenum">
-              <a:rPr lang="en-US" smtClean="0"/>
-              <a:t>6</a:t>
-            </a:fld>
-            <a:endParaRPr lang="en-US"/>
-          </a:p>
-        </p:txBody>
-      </p:sp>
-    </p:spTree>
-    <p:extLst>
-      <p:ext uri="{BB962C8B-B14F-4D97-AF65-F5344CB8AC3E}">
-        <p14:creationId xmlns:p14="http://schemas.microsoft.com/office/powerpoint/2010/main" val="3371662396"/>
-      </p:ext>
-    </p:extLst>
-  </p:cSld>
-  <p:clrMapOvr>
-    <a:masterClrMapping/>
-  </p:clrMapOvr>
-</p:notes>
-</file>
-
-<file path=ppt/notesSlides/notesSlide6.xml><?xml version="1.0" encoding="utf-8"?>
-<p:notes xmlns:a="http://schemas.openxmlformats.org/drawingml/2006/main" xmlns:r="http://schemas.openxmlformats.org/officeDocument/2006/relationships" xmlns:p="http://schemas.openxmlformats.org/presentationml/2006/main">
-  <p:cSld>
-    <p:spTree>
-      <p:nvGrpSpPr>
-        <p:cNvPr id="1" name=""/>
-        <p:cNvGrpSpPr/>
-        <p:nvPr/>
-      </p:nvGrpSpPr>
-      <p:grpSpPr>
-        <a:xfrm>
-          <a:off x="0" y="0"/>
-          <a:ext cx="0" cy="0"/>
-          <a:chOff x="0" y="0"/>
-          <a:chExt cx="0" cy="0"/>
-        </a:xfrm>
-      </p:grpSpPr>
-      <p:sp>
-        <p:nvSpPr>
-          <p:cNvPr id="2" name="Slide Image Placeholder 1"/>
-          <p:cNvSpPr>
-            <a:spLocks noGrp="1" noRot="1" noChangeAspect="1"/>
-          </p:cNvSpPr>
-          <p:nvPr>
-            <p:ph type="sldImg"/>
-          </p:nvPr>
-        </p:nvSpPr>
-        <p:spPr/>
-      </p:sp>
-      <p:sp>
-        <p:nvSpPr>
-          <p:cNvPr id="3" name="Notes Placeholder 2"/>
-          <p:cNvSpPr>
-            <a:spLocks noGrp="1"/>
-          </p:cNvSpPr>
-          <p:nvPr>
-            <p:ph type="body" idx="1"/>
-          </p:nvPr>
-        </p:nvSpPr>
-        <p:spPr/>
-        <p:txBody>
-          <a:bodyPr/>
-          <a:lstStyle/>
-          <a:p>
-            <a:r>
-              <a:rPr lang="en-US">
-                <a:latin typeface="Calibri"/>
-                <a:ea typeface="Calibri"/>
-                <a:cs typeface="Calibri"/>
-              </a:rPr>
               <a:t>Roma</a:t>
             </a:r>
             <a:endParaRPr lang="en-US"/>
@@ -2843,7 +2751,7 @@
           <a:p>
             <a:fld id="{D994A83A-D7B7-F74C-80E6-B7ADD29D3C27}" type="slidenum">
               <a:rPr lang="en-US" smtClean="0"/>
-              <a:t>7</a:t>
+              <a:t>6</a:t>
             </a:fld>
             <a:endParaRPr lang="en-US"/>
           </a:p>
@@ -3009,7 +2917,7 @@
           <a:p>
             <a:fld id="{445941C3-6C6E-214E-9FE3-18D5E20230BA}" type="datetimeFigureOut">
               <a:rPr lang="en-US" smtClean="0"/>
-              <a:t>5/6/2026</a:t>
+              <a:t>5/8/2026</a:t>
             </a:fld>
             <a:endParaRPr lang="en-US"/>
           </a:p>
@@ -3207,7 +3115,7 @@
           <a:p>
             <a:fld id="{445941C3-6C6E-214E-9FE3-18D5E20230BA}" type="datetimeFigureOut">
               <a:rPr lang="en-US" smtClean="0"/>
-              <a:t>5/6/2026</a:t>
+              <a:t>5/8/2026</a:t>
             </a:fld>
             <a:endParaRPr lang="en-US"/>
           </a:p>
@@ -3415,7 +3323,7 @@
           <a:p>
             <a:fld id="{445941C3-6C6E-214E-9FE3-18D5E20230BA}" type="datetimeFigureOut">
               <a:rPr lang="en-US" smtClean="0"/>
-              <a:t>5/6/2026</a:t>
+              <a:t>5/8/2026</a:t>
             </a:fld>
             <a:endParaRPr lang="en-US"/>
           </a:p>
@@ -3613,7 +3521,7 @@
           <a:p>
             <a:fld id="{445941C3-6C6E-214E-9FE3-18D5E20230BA}" type="datetimeFigureOut">
               <a:rPr lang="en-US" smtClean="0"/>
-              <a:t>5/6/2026</a:t>
+              <a:t>5/8/2026</a:t>
             </a:fld>
             <a:endParaRPr lang="en-US"/>
           </a:p>
@@ -3888,7 +3796,7 @@
           <a:p>
             <a:fld id="{445941C3-6C6E-214E-9FE3-18D5E20230BA}" type="datetimeFigureOut">
               <a:rPr lang="en-US" smtClean="0"/>
-              <a:t>5/6/2026</a:t>
+              <a:t>5/8/2026</a:t>
             </a:fld>
             <a:endParaRPr lang="en-US"/>
           </a:p>
@@ -4153,7 +4061,7 @@
           <a:p>
             <a:fld id="{445941C3-6C6E-214E-9FE3-18D5E20230BA}" type="datetimeFigureOut">
               <a:rPr lang="en-US" smtClean="0"/>
-              <a:t>5/6/2026</a:t>
+              <a:t>5/8/2026</a:t>
             </a:fld>
             <a:endParaRPr lang="en-US"/>
           </a:p>
@@ -4565,7 +4473,7 @@
           <a:p>
             <a:fld id="{445941C3-6C6E-214E-9FE3-18D5E20230BA}" type="datetimeFigureOut">
               <a:rPr lang="en-US" smtClean="0"/>
-              <a:t>5/6/2026</a:t>
+              <a:t>5/8/2026</a:t>
             </a:fld>
             <a:endParaRPr lang="en-US"/>
           </a:p>
@@ -4706,7 +4614,7 @@
           <a:p>
             <a:fld id="{445941C3-6C6E-214E-9FE3-18D5E20230BA}" type="datetimeFigureOut">
               <a:rPr lang="en-US" smtClean="0"/>
-              <a:t>5/6/2026</a:t>
+              <a:t>5/8/2026</a:t>
             </a:fld>
             <a:endParaRPr lang="en-US"/>
           </a:p>
@@ -4819,7 +4727,7 @@
           <a:p>
             <a:fld id="{445941C3-6C6E-214E-9FE3-18D5E20230BA}" type="datetimeFigureOut">
               <a:rPr lang="en-US" smtClean="0"/>
-              <a:t>5/6/2026</a:t>
+              <a:t>5/8/2026</a:t>
             </a:fld>
             <a:endParaRPr lang="en-US"/>
           </a:p>
@@ -5130,7 +5038,7 @@
           <a:p>
             <a:fld id="{445941C3-6C6E-214E-9FE3-18D5E20230BA}" type="datetimeFigureOut">
               <a:rPr lang="en-US" smtClean="0"/>
-              <a:t>5/6/2026</a:t>
+              <a:t>5/8/2026</a:t>
             </a:fld>
             <a:endParaRPr lang="en-US"/>
           </a:p>
@@ -5418,7 +5326,7 @@
           <a:p>
             <a:fld id="{445941C3-6C6E-214E-9FE3-18D5E20230BA}" type="datetimeFigureOut">
               <a:rPr lang="en-US" smtClean="0"/>
-              <a:t>5/6/2026</a:t>
+              <a:t>5/8/2026</a:t>
             </a:fld>
             <a:endParaRPr lang="en-US"/>
           </a:p>
@@ -5659,7 +5567,7 @@
           <a:p>
             <a:fld id="{445941C3-6C6E-214E-9FE3-18D5E20230BA}" type="datetimeFigureOut">
               <a:rPr lang="en-US" smtClean="0"/>
-              <a:t>5/6/2026</a:t>
+              <a:t>5/8/2026</a:t>
             </a:fld>
             <a:endParaRPr lang="en-US"/>
           </a:p>
@@ -21220,8 +21128,12 @@
                 </a:spcAft>
               </a:pPr>
               <a:r>
+                <a:rPr lang="en-US" sz="2400" dirty="0"/>
+                <a:t>I</a:t>
+              </a:r>
+              <a:r>
                 <a:rPr lang="en-US" sz="2400" kern="1200" dirty="0"/>
-                <a:t>Lessons learned and if w</a:t>
+                <a:t>f w</a:t>
               </a:r>
               <a:r>
                 <a:rPr lang="en-US" sz="2400" dirty="0"/>
@@ -24917,373 +24829,6 @@
   <p:cSld>
     <p:bg>
       <p:bgPr>
-        <a:solidFill>
-          <a:schemeClr val="bg1"/>
-        </a:solidFill>
-        <a:effectLst/>
-      </p:bgPr>
-    </p:bg>
-    <p:spTree>
-      <p:nvGrpSpPr>
-        <p:cNvPr id="1" name=""/>
-        <p:cNvGrpSpPr/>
-        <p:nvPr/>
-      </p:nvGrpSpPr>
-      <p:grpSpPr>
-        <a:xfrm>
-          <a:off x="0" y="0"/>
-          <a:ext cx="0" cy="0"/>
-          <a:chOff x="0" y="0"/>
-          <a:chExt cx="0" cy="0"/>
-        </a:xfrm>
-      </p:grpSpPr>
-      <p:sp useBgFill="1">
-        <p:nvSpPr>
-          <p:cNvPr id="12" name="Rectangle 11">
-            <a:extLst>
-              <a:ext uri="{FF2B5EF4-FFF2-40B4-BE49-F238E27FC236}">
-                <a16:creationId xmlns:a16="http://schemas.microsoft.com/office/drawing/2014/main" id="{B14C2221-2B8C-494D-9442-F812DF4E8794}"/>
-              </a:ext>
-              <a:ext uri="{C183D7F6-B498-43B3-948B-1728B52AA6E4}">
-                <adec:decorative xmlns:adec="http://schemas.microsoft.com/office/drawing/2017/decorative" val="1"/>
-              </a:ext>
-            </a:extLst>
-          </p:cNvPr>
-          <p:cNvSpPr>
-            <a:spLocks noGrp="1" noRot="1" noChangeAspect="1" noMove="1" noResize="1" noEditPoints="1" noAdjustHandles="1" noChangeArrowheads="1" noChangeShapeType="1" noTextEdit="1"/>
-          </p:cNvSpPr>
-          <p:nvPr>
-            <p:extLst>
-              <p:ext uri="{386F3935-93C4-4BCD-93E2-E3B085C9AB24}">
-                <p16:designElem xmlns:p16="http://schemas.microsoft.com/office/powerpoint/2015/main" val="1"/>
-              </p:ext>
-            </p:extLst>
-          </p:nvPr>
-        </p:nvSpPr>
-        <p:spPr>
-          <a:xfrm>
-            <a:off x="0" y="-1"/>
-            <a:ext cx="12188952" cy="6858000"/>
-          </a:xfrm>
-          <a:prstGeom prst="rect">
-            <a:avLst/>
-          </a:prstGeom>
-          <a:ln>
-            <a:noFill/>
-          </a:ln>
-        </p:spPr>
-        <p:style>
-          <a:lnRef idx="2">
-            <a:schemeClr val="accent1">
-              <a:shade val="50000"/>
-            </a:schemeClr>
-          </a:lnRef>
-          <a:fillRef idx="1">
-            <a:schemeClr val="accent1"/>
-          </a:fillRef>
-          <a:effectRef idx="0">
-            <a:schemeClr val="accent1"/>
-          </a:effectRef>
-          <a:fontRef idx="minor">
-            <a:schemeClr val="lt1"/>
-          </a:fontRef>
-        </p:style>
-        <p:txBody>
-          <a:bodyPr rtlCol="0" anchor="ctr"/>
-          <a:lstStyle/>
-          <a:p>
-            <a:pPr algn="ctr"/>
-            <a:endParaRPr lang="en-US"/>
-          </a:p>
-        </p:txBody>
-      </p:sp>
-      <p:sp>
-        <p:nvSpPr>
-          <p:cNvPr id="2" name="Title 1">
-            <a:extLst>
-              <a:ext uri="{FF2B5EF4-FFF2-40B4-BE49-F238E27FC236}">
-                <a16:creationId xmlns:a16="http://schemas.microsoft.com/office/drawing/2014/main" id="{FCE2ECCF-FC3D-2EBC-86D7-73C2C84D5433}"/>
-              </a:ext>
-            </a:extLst>
-          </p:cNvPr>
-          <p:cNvSpPr>
-            <a:spLocks noGrp="1"/>
-          </p:cNvSpPr>
-          <p:nvPr>
-            <p:ph type="title"/>
-          </p:nvPr>
-        </p:nvSpPr>
-        <p:spPr>
-          <a:xfrm>
-            <a:off x="-238276" y="2497930"/>
-            <a:ext cx="4788202" cy="2601119"/>
-          </a:xfrm>
-        </p:spPr>
-        <p:txBody>
-          <a:bodyPr anchor="t">
-            <a:normAutofit/>
-          </a:bodyPr>
-          <a:lstStyle/>
-          <a:p>
-            <a:pPr algn="ctr"/>
-            <a:r>
-              <a:rPr lang="en-US" sz="4000"/>
-              <a:t>Lessons learned</a:t>
-            </a:r>
-          </a:p>
-        </p:txBody>
-      </p:sp>
-      <p:pic>
-        <p:nvPicPr>
-          <p:cNvPr id="13" name="Graphic 12" descr="Head with Gears">
-            <a:extLst>
-              <a:ext uri="{FF2B5EF4-FFF2-40B4-BE49-F238E27FC236}">
-                <a16:creationId xmlns:a16="http://schemas.microsoft.com/office/drawing/2014/main" id="{78A3ADFD-8ABE-137C-C1D5-E47E78C99138}"/>
-              </a:ext>
-            </a:extLst>
-          </p:cNvPr>
-          <p:cNvPicPr>
-            <a:picLocks noChangeAspect="1"/>
-          </p:cNvPicPr>
-          <p:nvPr/>
-        </p:nvPicPr>
-        <p:blipFill>
-          <a:blip r:embed="rId3">
-            <a:extLst>
-              <a:ext uri="{28A0092B-C50C-407E-A947-70E740481C1C}">
-                <a14:useLocalDpi xmlns:a14="http://schemas.microsoft.com/office/drawing/2010/main" val="0"/>
-              </a:ext>
-              <a:ext uri="{96DAC541-7B7A-43D3-8B79-37D633B846F1}">
-                <asvg:svgBlip xmlns:asvg="http://schemas.microsoft.com/office/drawing/2016/SVG/main" r:embed="rId4"/>
-              </a:ext>
-            </a:extLst>
-          </a:blip>
-          <a:stretch>
-            <a:fillRect/>
-          </a:stretch>
-        </p:blipFill>
-        <p:spPr>
-          <a:xfrm>
-            <a:off x="1569962" y="990337"/>
-            <a:ext cx="1168400" cy="1168400"/>
-          </a:xfrm>
-          <a:prstGeom prst="rect">
-            <a:avLst/>
-          </a:prstGeom>
-        </p:spPr>
-      </p:pic>
-      <p:sp>
-        <p:nvSpPr>
-          <p:cNvPr id="3" name="Content Placeholder 2">
-            <a:extLst>
-              <a:ext uri="{FF2B5EF4-FFF2-40B4-BE49-F238E27FC236}">
-                <a16:creationId xmlns:a16="http://schemas.microsoft.com/office/drawing/2014/main" id="{564BD65A-8469-E0CF-7D54-F38ABADF618D}"/>
-              </a:ext>
-            </a:extLst>
-          </p:cNvPr>
-          <p:cNvSpPr>
-            <a:spLocks noGrp="1"/>
-          </p:cNvSpPr>
-          <p:nvPr>
-            <p:ph idx="1"/>
-          </p:nvPr>
-        </p:nvSpPr>
-        <p:spPr>
-          <a:xfrm>
-            <a:off x="4551414" y="560916"/>
-            <a:ext cx="7153147" cy="5384801"/>
-          </a:xfrm>
-        </p:spPr>
-        <p:txBody>
-          <a:bodyPr vert="horz" lIns="91440" tIns="45720" rIns="91440" bIns="45720" rtlCol="0" anchor="ctr">
-            <a:normAutofit/>
-          </a:bodyPr>
-          <a:lstStyle/>
-          <a:p>
-            <a:r>
-              <a:rPr lang="en-US" sz="2000" b="1">
-                <a:solidFill>
-                  <a:srgbClr val="FF0000"/>
-                </a:solidFill>
-                <a:latin typeface="Times New Roman"/>
-                <a:cs typeface="Times New Roman"/>
-              </a:rPr>
-              <a:t>AI inaccuracy issues:</a:t>
-            </a:r>
-          </a:p>
-          <a:p>
-            <a:pPr lvl="1">
-              <a:buFont typeface="Courier New" panose="020B0604020202020204" pitchFamily="34" charset="0"/>
-              <a:buChar char="o"/>
-            </a:pPr>
-            <a:r>
-              <a:rPr lang="en-US" sz="2000">
-                <a:latin typeface="Times New Roman"/>
-                <a:cs typeface="Times New Roman"/>
-              </a:rPr>
-              <a:t>Do not blindly trust AI.</a:t>
-            </a:r>
-          </a:p>
-          <a:p>
-            <a:pPr lvl="1">
-              <a:buFont typeface="Courier New" panose="020B0604020202020204" pitchFamily="34" charset="0"/>
-              <a:buChar char="o"/>
-            </a:pPr>
-            <a:r>
-              <a:rPr lang="en-US" sz="2000">
-                <a:latin typeface="Times New Roman"/>
-                <a:cs typeface="Times New Roman"/>
-              </a:rPr>
-              <a:t>Check over the code it gives you.</a:t>
-            </a:r>
-          </a:p>
-          <a:p>
-            <a:pPr marL="457200" lvl="1" indent="0">
-              <a:buNone/>
-            </a:pPr>
-            <a:endParaRPr lang="en-US" sz="2000">
-              <a:latin typeface="Times New Roman"/>
-              <a:cs typeface="Times New Roman"/>
-            </a:endParaRPr>
-          </a:p>
-          <a:p>
-            <a:r>
-              <a:rPr lang="en-US" sz="2000" b="1">
-                <a:solidFill>
-                  <a:srgbClr val="FF0000"/>
-                </a:solidFill>
-                <a:latin typeface="Times New Roman"/>
-                <a:cs typeface="Times New Roman"/>
-              </a:rPr>
-              <a:t>Veryfi categories:</a:t>
-            </a:r>
-          </a:p>
-          <a:p>
-            <a:pPr lvl="1">
-              <a:buFont typeface="Courier New" panose="020B0604020202020204" pitchFamily="34" charset="0"/>
-              <a:buChar char="o"/>
-            </a:pPr>
-            <a:r>
-              <a:rPr lang="en-US" sz="2000">
-                <a:latin typeface="Times New Roman"/>
-                <a:cs typeface="Times New Roman"/>
-              </a:rPr>
-              <a:t>Could not get it to categorize.</a:t>
-            </a:r>
-          </a:p>
-          <a:p>
-            <a:pPr lvl="1">
-              <a:buFont typeface="Courier New" panose="020B0604020202020204" pitchFamily="34" charset="0"/>
-              <a:buChar char="o"/>
-            </a:pPr>
-            <a:r>
-              <a:rPr lang="en-US" sz="2000">
-                <a:latin typeface="Times New Roman"/>
-                <a:cs typeface="Times New Roman"/>
-              </a:rPr>
-              <a:t>Mapped to </a:t>
-            </a:r>
-            <a:r>
-              <a:rPr lang="en-US" sz="2000" err="1">
-                <a:latin typeface="Times New Roman"/>
-                <a:cs typeface="Times New Roman"/>
-              </a:rPr>
-              <a:t>Veryfi</a:t>
-            </a:r>
-            <a:r>
-              <a:rPr lang="en-US" sz="2000">
-                <a:latin typeface="Times New Roman"/>
-                <a:cs typeface="Times New Roman"/>
-              </a:rPr>
-              <a:t> given categories.</a:t>
-            </a:r>
-          </a:p>
-          <a:p>
-            <a:pPr marL="457200" lvl="1" indent="0">
-              <a:buNone/>
-            </a:pPr>
-            <a:endParaRPr lang="en-US" sz="2000">
-              <a:latin typeface="Times New Roman"/>
-              <a:cs typeface="Times New Roman"/>
-            </a:endParaRPr>
-          </a:p>
-          <a:p>
-            <a:r>
-              <a:rPr lang="en-US" sz="2000" b="1">
-                <a:solidFill>
-                  <a:srgbClr val="FF0000"/>
-                </a:solidFill>
-                <a:latin typeface="Times New Roman"/>
-                <a:cs typeface="Times New Roman"/>
-              </a:rPr>
-              <a:t>Testing:</a:t>
-            </a:r>
-            <a:endParaRPr lang="en-US" sz="2000">
-              <a:solidFill>
-                <a:srgbClr val="FF0000"/>
-              </a:solidFill>
-              <a:latin typeface="Times New Roman"/>
-              <a:cs typeface="Times New Roman"/>
-            </a:endParaRPr>
-          </a:p>
-          <a:p>
-            <a:pPr lvl="1">
-              <a:buFont typeface="Courier New" panose="020B0604020202020204" pitchFamily="34" charset="0"/>
-              <a:buChar char="o"/>
-            </a:pPr>
-            <a:r>
-              <a:rPr lang="en-US" sz="2000">
-                <a:latin typeface="Times New Roman"/>
-                <a:cs typeface="Times New Roman"/>
-              </a:rPr>
-              <a:t>There is a lot of situations to test.</a:t>
-            </a:r>
-          </a:p>
-          <a:p>
-            <a:pPr lvl="1">
-              <a:buFont typeface="Courier New" panose="020B0604020202020204" pitchFamily="34" charset="0"/>
-              <a:buChar char="o"/>
-            </a:pPr>
-            <a:r>
-              <a:rPr lang="en-US" sz="2000">
-                <a:latin typeface="Times New Roman"/>
-                <a:cs typeface="Times New Roman"/>
-              </a:rPr>
-              <a:t>Having multiple accounts with different amount of data helps.</a:t>
-            </a:r>
-          </a:p>
-          <a:p>
-            <a:endParaRPr lang="en-US" sz="2000">
-              <a:latin typeface="Times New Roman"/>
-              <a:cs typeface="Times New Roman"/>
-            </a:endParaRPr>
-          </a:p>
-          <a:p>
-            <a:endParaRPr lang="en-US" sz="2000">
-              <a:latin typeface="Times New Roman"/>
-              <a:cs typeface="Times New Roman"/>
-            </a:endParaRPr>
-          </a:p>
-        </p:txBody>
-      </p:sp>
-    </p:spTree>
-    <p:extLst>
-      <p:ext uri="{BB962C8B-B14F-4D97-AF65-F5344CB8AC3E}">
-        <p14:creationId xmlns:p14="http://schemas.microsoft.com/office/powerpoint/2010/main" val="2364213921"/>
-      </p:ext>
-    </p:extLst>
-  </p:cSld>
-  <p:clrMapOvr>
-    <a:masterClrMapping/>
-  </p:clrMapOvr>
-</p:sld>
-</file>
-
-<file path=ppt/slides/slide7.xml><?xml version="1.0" encoding="utf-8"?>
-<p:sld xmlns:a="http://schemas.openxmlformats.org/drawingml/2006/main" xmlns:r="http://schemas.openxmlformats.org/officeDocument/2006/relationships" xmlns:p="http://schemas.openxmlformats.org/presentationml/2006/main">
-  <p:cSld>
-    <p:bg>
-      <p:bgPr>
         <a:blipFill>
           <a:blip r:embed="rId3"/>
           <a:stretch>
@@ -25953,7 +25498,7 @@
 </p:sld>
 </file>
 
-<file path=ppt/slides/slide8.xml><?xml version="1.0" encoding="utf-8"?>
+<file path=ppt/slides/slide7.xml><?xml version="1.0" encoding="utf-8"?>
 <p:sld xmlns:a="http://schemas.openxmlformats.org/drawingml/2006/main" xmlns:r="http://schemas.openxmlformats.org/officeDocument/2006/relationships" xmlns:p="http://schemas.openxmlformats.org/presentationml/2006/main">
   <p:cSld>
     <p:spTree>
